--- a/presentation/HSL_Technical_Assessment_3DGS_Composition.pptx
+++ b/presentation/HSL_Technical_Assessment_3DGS_Composition.pptx
@@ -5508,7 +5508,7 @@
                 </a:solidFill>
                 <a:latin typeface="Aptos Display"/>
               </a:rPr>
-              <a:t>What I Would Defend</a:t>
+              <a:t>Result &amp; Defense</a:t>
             </a:r>
           </a:p>
         </p:txBody>
@@ -5522,7 +5522,7 @@
         <p:spPr>
           <a:xfrm>
             <a:off x="711182" y="952500"/>
-            <a:ext cx="7048323" cy="355600"/>
+            <a:ext cx="8000799" cy="355600"/>
           </a:xfrm>
           <a:prstGeom prst="rect">
             <a:avLst/>
@@ -5543,56 +5543,125 @@
                 </a:solidFill>
                 <a:latin typeface="Aptos"/>
               </a:rPr>
-              <a:t>The hard part is not only training splats. It is choosing a defensible cross-dataset similarity transform.</a:t>
-            </a:r>
-          </a:p>
-        </p:txBody>
-      </p:sp>
-      <p:cxnSp>
-        <p:nvCxnSpPr>
-          <p:cNvPr id="5" name="Connector 4"/>
-          <p:cNvCxnSpPr/>
-          <p:nvPr/>
-        </p:nvCxnSpPr>
-        <p:spPr>
-          <a:xfrm>
-            <a:off x="749281" y="1873250"/>
-            <a:ext cx="0" cy="3587750"/>
-          </a:xfrm>
-          <a:prstGeom prst="line">
-            <a:avLst/>
-          </a:prstGeom>
-          <a:ln w="38100">
+              <a:t>The output is not a 2D paste. It is one merged 3DGS point cloud rendered through the Bicycle cameras.</a:t>
+            </a:r>
+          </a:p>
+        </p:txBody>
+      </p:sp>
+      <p:pic>
+        <p:nvPicPr>
+          <p:cNvPr id="5" name="Picture 4" descr="hsl_final_result.png"/>
+          <p:cNvPicPr>
+            <a:picLocks noChangeAspect="1"/>
+          </p:cNvPicPr>
+          <p:nvPr/>
+        </p:nvPicPr>
+        <p:blipFill>
+          <a:blip r:embed="rId2"/>
+          <a:stretch>
+            <a:fillRect/>
+          </a:stretch>
+        </p:blipFill>
+        <p:spPr>
+          <a:xfrm>
+            <a:off x="698482" y="1592123"/>
+            <a:ext cx="5714857" cy="3800752"/>
+          </a:xfrm>
+          <a:prstGeom prst="rect">
+            <a:avLst/>
+          </a:prstGeom>
+        </p:spPr>
+      </p:pic>
+      <p:sp>
+        <p:nvSpPr>
+          <p:cNvPr id="6" name="Rectangle 5"/>
+          <p:cNvSpPr/>
+          <p:nvPr/>
+        </p:nvSpPr>
+        <p:spPr>
+          <a:xfrm>
+            <a:off x="698482" y="1587500"/>
+            <a:ext cx="5714857" cy="3810000"/>
+          </a:xfrm>
+          <a:prstGeom prst="rect">
+            <a:avLst/>
+          </a:prstGeom>
+          <a:solidFill>
+            <a:srgbClr val="FFFFFF"/>
+          </a:solidFill>
+          <a:ln w="12700">
             <a:solidFill>
               <a:srgbClr val="C8C2B4"/>
             </a:solidFill>
           </a:ln>
         </p:spPr>
         <p:style>
-          <a:lnRef idx="2">
+          <a:lnRef idx="1">
             <a:schemeClr val="accent1"/>
           </a:lnRef>
-          <a:fillRef idx="0">
+          <a:fillRef idx="3">
             <a:schemeClr val="accent1"/>
           </a:fillRef>
-          <a:effectRef idx="1">
+          <a:effectRef idx="2">
             <a:schemeClr val="accent1"/>
           </a:effectRef>
           <a:fontRef idx="minor">
-            <a:schemeClr val="tx1"/>
+            <a:schemeClr val="lt1"/>
           </a:fontRef>
         </p:style>
-      </p:cxnSp>
-      <p:sp>
-        <p:nvSpPr>
-          <p:cNvPr id="6" name="Oval 5"/>
+        <p:txBody>
+          <a:bodyPr rtlCol="0" anchor="ctr"/>
+          <a:lstStyle/>
+          <a:p>
+            <a:pPr algn="ctr"/>
+          </a:p>
+        </p:txBody>
+      </p:sp>
+      <p:sp>
+        <p:nvSpPr>
+          <p:cNvPr id="7" name="TextBox 6"/>
+          <p:cNvSpPr txBox="1"/>
+          <p:nvPr/>
+        </p:nvSpPr>
+        <p:spPr>
+          <a:xfrm>
+            <a:off x="698482" y="5537200"/>
+            <a:ext cx="2349441" cy="241300"/>
+          </a:xfrm>
+          <a:prstGeom prst="rect">
+            <a:avLst/>
+          </a:prstGeom>
+          <a:noFill/>
+        </p:spPr>
+        <p:txBody>
+          <a:bodyPr wrap="square" lIns="0" rIns="0" tIns="0" bIns="0">
+            <a:spAutoFit/>
+          </a:bodyPr>
+          <a:lstStyle/>
+          <a:p>
+            <a:pPr algn="l"/>
+            <a:r>
+              <a:rPr sz="1900" b="1">
+                <a:solidFill>
+                  <a:srgbClr val="1F766F"/>
+                </a:solidFill>
+                <a:latin typeface="Aptos"/>
+              </a:rPr>
+              <a:t>final composed render</a:t>
+            </a:r>
+          </a:p>
+        </p:txBody>
+      </p:sp>
+      <p:sp>
+        <p:nvSpPr>
+          <p:cNvPr id="8" name="Oval 7"/>
           <p:cNvSpPr/>
           <p:nvPr/>
         </p:nvSpPr>
         <p:spPr>
           <a:xfrm>
-            <a:off x="584185" y="1657350"/>
-            <a:ext cx="330191" cy="330200"/>
+            <a:off x="6807029" y="1676400"/>
+            <a:ext cx="292092" cy="292100"/>
           </a:xfrm>
           <a:prstGeom prst="ellipse">
             <a:avLst/>
@@ -5628,14 +5697,14 @@
       </p:sp>
       <p:sp>
         <p:nvSpPr>
-          <p:cNvPr id="7" name="TextBox 6"/>
+          <p:cNvPr id="9" name="TextBox 8"/>
           <p:cNvSpPr txBox="1"/>
           <p:nvPr/>
         </p:nvSpPr>
         <p:spPr>
           <a:xfrm>
-            <a:off x="1092172" y="1600200"/>
-            <a:ext cx="2984425" cy="266700"/>
+            <a:off x="7264218" y="1612900"/>
+            <a:ext cx="2920926" cy="266700"/>
           </a:xfrm>
           <a:prstGeom prst="rect">
             <a:avLst/>
@@ -5656,21 +5725,21 @@
                 </a:solidFill>
                 <a:latin typeface="Aptos"/>
               </a:rPr>
-              <a:t>Scale ambiguity</a:t>
-            </a:r>
-          </a:p>
-        </p:txBody>
-      </p:sp>
-      <p:sp>
-        <p:nvSpPr>
-          <p:cNvPr id="8" name="TextBox 7"/>
+              <a:t>Result</a:t>
+            </a:r>
+          </a:p>
+        </p:txBody>
+      </p:sp>
+      <p:sp>
+        <p:nvSpPr>
+          <p:cNvPr id="10" name="TextBox 9"/>
           <p:cNvSpPr txBox="1"/>
           <p:nvPr/>
         </p:nvSpPr>
         <p:spPr>
           <a:xfrm>
-            <a:off x="4127396" y="1600200"/>
-            <a:ext cx="6032349" cy="406400"/>
+            <a:off x="7264218" y="1943100"/>
+            <a:ext cx="3936901" cy="584200"/>
           </a:xfrm>
           <a:prstGeom prst="rect">
             <a:avLst/>
@@ -5685,39 +5754,39 @@
           <a:p>
             <a:pPr algn="l"/>
             <a:r>
-              <a:rPr sz="2400" b="0">
+              <a:rPr sz="2300" b="0">
                 <a:solidFill>
                   <a:srgbClr val="5F6B73"/>
                 </a:solidFill>
                 <a:latin typeface="Aptos"/>
               </a:rPr>
-              <a:t>COLMAP and Blender cameras are internally calibrated,</a:t>
+              <a:t>Separate Bicycle and Chair 3DGS models</a:t>
             </a:r>
           </a:p>
           <a:p>
             <a:pPr algn="l"/>
             <a:r>
-              <a:rPr sz="2400" b="0">
+              <a:rPr sz="2300" b="0">
                 <a:solidFill>
                   <a:srgbClr val="5F6B73"/>
                 </a:solidFill>
                 <a:latin typeface="Aptos"/>
               </a:rPr>
-              <a:t>but Bicycle and Chair do not share a metric ruler.</a:t>
-            </a:r>
-          </a:p>
-        </p:txBody>
-      </p:sp>
-      <p:sp>
-        <p:nvSpPr>
-          <p:cNvPr id="9" name="Oval 8"/>
+              <a:t>merged into one splat point cloud.</a:t>
+            </a:r>
+          </a:p>
+        </p:txBody>
+      </p:sp>
+      <p:sp>
+        <p:nvSpPr>
+          <p:cNvPr id="11" name="Oval 10"/>
           <p:cNvSpPr/>
           <p:nvPr/>
         </p:nvSpPr>
         <p:spPr>
           <a:xfrm>
-            <a:off x="584185" y="2832100"/>
-            <a:ext cx="330191" cy="330200"/>
+            <a:off x="6807029" y="2705099"/>
+            <a:ext cx="292092" cy="292100"/>
           </a:xfrm>
           <a:prstGeom prst="ellipse">
             <a:avLst/>
@@ -5753,14 +5822,14 @@
       </p:sp>
       <p:sp>
         <p:nvSpPr>
-          <p:cNvPr id="10" name="TextBox 9"/>
+          <p:cNvPr id="12" name="TextBox 11"/>
           <p:cNvSpPr txBox="1"/>
           <p:nvPr/>
         </p:nvSpPr>
         <p:spPr>
           <a:xfrm>
-            <a:off x="1092172" y="2774950"/>
-            <a:ext cx="2984425" cy="266700"/>
+            <a:off x="7264218" y="2641600"/>
+            <a:ext cx="2920926" cy="266700"/>
           </a:xfrm>
           <a:prstGeom prst="rect">
             <a:avLst/>
@@ -5781,21 +5850,21 @@
                 </a:solidFill>
                 <a:latin typeface="Aptos"/>
               </a:rPr>
-              <a:t>Practical baseline</a:t>
-            </a:r>
-          </a:p>
-        </p:txBody>
-      </p:sp>
-      <p:sp>
-        <p:nvSpPr>
-          <p:cNvPr id="11" name="TextBox 10"/>
+              <a:t>Scale reasoning</a:t>
+            </a:r>
+          </a:p>
+        </p:txBody>
+      </p:sp>
+      <p:sp>
+        <p:nvSpPr>
+          <p:cNvPr id="13" name="TextBox 12"/>
           <p:cNvSpPr txBox="1"/>
           <p:nvPr/>
         </p:nvSpPr>
         <p:spPr>
           <a:xfrm>
-            <a:off x="4127396" y="2774950"/>
-            <a:ext cx="6032349" cy="406400"/>
+            <a:off x="7264218" y="2971800"/>
+            <a:ext cx="3936901" cy="584200"/>
           </a:xfrm>
           <a:prstGeom prst="rect">
             <a:avLst/>
@@ -5810,39 +5879,39 @@
           <a:p>
             <a:pPr algn="l"/>
             <a:r>
-              <a:rPr sz="2400" b="0">
+              <a:rPr sz="2300" b="0">
                 <a:solidFill>
                   <a:srgbClr val="5F6B73"/>
                 </a:solidFill>
                 <a:latin typeface="Aptos"/>
               </a:rPr>
-              <a:t>Use bounds, visual anchors, and an interactive placement loop;</a:t>
+              <a:t>Cross-dataset scale is ambiguous;</a:t>
             </a:r>
           </a:p>
           <a:p>
             <a:pPr algn="l"/>
             <a:r>
-              <a:rPr sz="2400" b="0">
+              <a:rPr sz="2300" b="0">
                 <a:solidFill>
                   <a:srgbClr val="5F6B73"/>
                 </a:solidFill>
                 <a:latin typeface="Aptos"/>
               </a:rPr>
-              <a:t>keep every value in the JSON config.</a:t>
-            </a:r>
-          </a:p>
-        </p:txBody>
-      </p:sp>
-      <p:sp>
-        <p:nvSpPr>
-          <p:cNvPr id="12" name="Oval 11"/>
+              <a:t>bounds and visual anchors define s, R, t.</a:t>
+            </a:r>
+          </a:p>
+        </p:txBody>
+      </p:sp>
+      <p:sp>
+        <p:nvSpPr>
+          <p:cNvPr id="14" name="Oval 13"/>
           <p:cNvSpPr/>
           <p:nvPr/>
         </p:nvSpPr>
         <p:spPr>
           <a:xfrm>
-            <a:off x="584185" y="4006850"/>
-            <a:ext cx="330191" cy="330200"/>
+            <a:off x="6807029" y="3733799"/>
+            <a:ext cx="292092" cy="292100"/>
           </a:xfrm>
           <a:prstGeom prst="ellipse">
             <a:avLst/>
@@ -5878,14 +5947,14 @@
       </p:sp>
       <p:sp>
         <p:nvSpPr>
-          <p:cNvPr id="13" name="TextBox 12"/>
+          <p:cNvPr id="15" name="TextBox 14"/>
           <p:cNvSpPr txBox="1"/>
           <p:nvPr/>
         </p:nvSpPr>
         <p:spPr>
           <a:xfrm>
-            <a:off x="1092172" y="3949700"/>
-            <a:ext cx="2984425" cy="266700"/>
+            <a:off x="7264218" y="3670300"/>
+            <a:ext cx="2920926" cy="266700"/>
           </a:xfrm>
           <a:prstGeom prst="rect">
             <a:avLst/>
@@ -5906,21 +5975,21 @@
                 </a:solidFill>
                 <a:latin typeface="Aptos"/>
               </a:rPr>
-              <a:t>Likely bottlenecks</a:t>
-            </a:r>
-          </a:p>
-        </p:txBody>
-      </p:sp>
-      <p:sp>
-        <p:nvSpPr>
-          <p:cNvPr id="14" name="TextBox 13"/>
+              <a:t>Conflicts</a:t>
+            </a:r>
+          </a:p>
+        </p:txBody>
+      </p:sp>
+      <p:sp>
+        <p:nvSpPr>
+          <p:cNvPr id="16" name="TextBox 15"/>
           <p:cNvSpPr txBox="1"/>
           <p:nvPr/>
         </p:nvSpPr>
         <p:spPr>
           <a:xfrm>
-            <a:off x="4127396" y="3949700"/>
-            <a:ext cx="6032349" cy="406400"/>
+            <a:off x="7264218" y="4000500"/>
+            <a:ext cx="3936901" cy="584200"/>
           </a:xfrm>
           <a:prstGeom prst="rect">
             <a:avLst/>
@@ -5935,39 +6004,39 @@
           <a:p>
             <a:pPr algn="l"/>
             <a:r>
-              <a:rPr sz="2400" b="0">
+              <a:rPr sz="2300" b="0">
                 <a:solidFill>
                   <a:srgbClr val="5F6B73"/>
                 </a:solidFill>
                 <a:latin typeface="Aptos"/>
               </a:rPr>
-              <a:t>CUDA setup, floaters, splat intersections, and color mismatch</a:t>
+              <a:t>One rasterizer pass gives depth sorting;</a:t>
             </a:r>
           </a:p>
           <a:p>
             <a:pPr algn="l"/>
             <a:r>
-              <a:rPr sz="2400" b="0">
+              <a:rPr sz="2300" b="0">
                 <a:solidFill>
                   <a:srgbClr val="5F6B73"/>
                 </a:solidFill>
                 <a:latin typeface="Aptos"/>
               </a:rPr>
-              <a:t>between real outdoor imagery and synthetic lighting.</a:t>
-            </a:r>
-          </a:p>
-        </p:txBody>
-      </p:sp>
-      <p:sp>
-        <p:nvSpPr>
-          <p:cNvPr id="15" name="Oval 14"/>
+              <a:t>floaters and soft splats remain visible.</a:t>
+            </a:r>
+          </a:p>
+        </p:txBody>
+      </p:sp>
+      <p:sp>
+        <p:nvSpPr>
+          <p:cNvPr id="17" name="Oval 16"/>
           <p:cNvSpPr/>
           <p:nvPr/>
         </p:nvSpPr>
         <p:spPr>
           <a:xfrm>
-            <a:off x="584185" y="5181599"/>
-            <a:ext cx="330191" cy="330200"/>
+            <a:off x="6807029" y="4762500"/>
+            <a:ext cx="292092" cy="292100"/>
           </a:xfrm>
           <a:prstGeom prst="ellipse">
             <a:avLst/>
@@ -6003,14 +6072,14 @@
       </p:sp>
       <p:sp>
         <p:nvSpPr>
-          <p:cNvPr id="16" name="TextBox 15"/>
+          <p:cNvPr id="18" name="TextBox 17"/>
           <p:cNvSpPr txBox="1"/>
           <p:nvPr/>
         </p:nvSpPr>
         <p:spPr>
           <a:xfrm>
-            <a:off x="1092172" y="5124450"/>
-            <a:ext cx="2984425" cy="266700"/>
+            <a:off x="7264218" y="4699000"/>
+            <a:ext cx="2920926" cy="266700"/>
           </a:xfrm>
           <a:prstGeom prst="rect">
             <a:avLst/>
@@ -6038,14 +6107,14 @@
       </p:sp>
       <p:sp>
         <p:nvSpPr>
-          <p:cNvPr id="17" name="TextBox 16"/>
+          <p:cNvPr id="19" name="TextBox 18"/>
           <p:cNvSpPr txBox="1"/>
           <p:nvPr/>
         </p:nvSpPr>
         <p:spPr>
           <a:xfrm>
-            <a:off x="4127396" y="5124450"/>
-            <a:ext cx="6032349" cy="406400"/>
+            <a:off x="7264218" y="5029200"/>
+            <a:ext cx="3936901" cy="584200"/>
           </a:xfrm>
           <a:prstGeom prst="rect">
             <a:avLst/>
@@ -6060,27 +6129,39 @@
           <a:p>
             <a:pPr algn="l"/>
             <a:r>
-              <a:rPr sz="2400" b="0">
+              <a:rPr sz="2300" b="0">
                 <a:solidFill>
                   <a:srgbClr val="5F6B73"/>
                 </a:solidFill>
                 <a:latin typeface="Aptos"/>
               </a:rPr>
-              <a:t>Optimize a small asset-only SH/exposure correction while keeping geometry fixed.</a:t>
-            </a:r>
-          </a:p>
-        </p:txBody>
-      </p:sp>
-      <p:sp>
-        <p:nvSpPr>
-          <p:cNvPr id="18" name="TextBox 17"/>
+              <a:t>Optimize asset-only SH/exposure</a:t>
+            </a:r>
+          </a:p>
+          <a:p>
+            <a:pPr algn="l"/>
+            <a:r>
+              <a:rPr sz="2300" b="0">
+                <a:solidFill>
+                  <a:srgbClr val="5F6B73"/>
+                </a:solidFill>
+                <a:latin typeface="Aptos"/>
+              </a:rPr>
+              <a:t>while keeping geometry fixed.</a:t>
+            </a:r>
+          </a:p>
+        </p:txBody>
+      </p:sp>
+      <p:sp>
+        <p:nvSpPr>
+          <p:cNvPr id="20" name="TextBox 19"/>
           <p:cNvSpPr txBox="1"/>
           <p:nvPr/>
         </p:nvSpPr>
         <p:spPr>
           <a:xfrm>
             <a:off x="698482" y="6095999"/>
-            <a:ext cx="8254793" cy="215899"/>
+            <a:ext cx="9270768" cy="215899"/>
           </a:xfrm>
           <a:prstGeom prst="rect">
             <a:avLst/>
@@ -6101,7 +6182,7 @@
                 </a:solidFill>
                 <a:latin typeface="Aptos"/>
               </a:rPr>
-              <a:t>Submission assets: scripts, composer, placement UI, process notes, and this 3-slide deck.</a:t>
+              <a:t>Submission assets: code, process notes, Kaggle/Colab runners, final render, and this 3-slide deck.</a:t>
             </a:r>
           </a:p>
         </p:txBody>

--- a/presentation/HSL_Technical_Assessment_3DGS_Composition.pptx
+++ b/presentation/HSL_Technical_Assessment_3DGS_Composition.pptx
@@ -3231,8 +3231,8 @@
         </p:nvSpPr>
         <p:spPr>
           <a:xfrm>
-            <a:off x="736581" y="1333500"/>
-            <a:ext cx="4127396" cy="1650999"/>
+            <a:off x="736581" y="1206500"/>
+            <a:ext cx="4571885" cy="1460500"/>
           </a:xfrm>
           <a:prstGeom prst="rect">
             <a:avLst/>
@@ -3251,7 +3251,7 @@
               </a:lnSpc>
             </a:pPr>
             <a:r>
-              <a:rPr sz="7400" b="1">
+              <a:rPr sz="6600" b="1">
                 <a:solidFill>
                   <a:srgbClr val="111827"/>
                 </a:solidFill>
@@ -3267,7 +3267,7 @@
               </a:lnSpc>
             </a:pPr>
             <a:r>
-              <a:rPr sz="7400" b="1">
+              <a:rPr sz="6600" b="1">
                 <a:solidFill>
                   <a:srgbClr val="111827"/>
                 </a:solidFill>
@@ -3286,8 +3286,8 @@
         </p:nvSpPr>
         <p:spPr>
           <a:xfrm>
-            <a:off x="774680" y="3263900"/>
-            <a:ext cx="4190895" cy="761999"/>
+            <a:off x="774680" y="2984500"/>
+            <a:ext cx="4444888" cy="698500"/>
           </a:xfrm>
           <a:prstGeom prst="rect">
             <a:avLst/>
@@ -3302,13 +3302,13 @@
           <a:p>
             <a:pPr algn="l"/>
             <a:r>
-              <a:rPr sz="2600" b="0">
+              <a:rPr sz="2400" b="0">
                 <a:solidFill>
                   <a:srgbClr val="5F6B73"/>
                 </a:solidFill>
                 <a:latin typeface="Aptos"/>
               </a:rPr>
-              <a:t>A reproducible baseline for inserting a separately trained foreground object into the Mip-NeRF 360 Bicycle scene.</a:t>
+              <a:t>Separately train Bicycle and a synthetic chair, then merge the foreground Gaussians into the scene.</a:t>
             </a:r>
           </a:p>
         </p:txBody>
@@ -3321,8 +3321,8 @@
         </p:nvSpPr>
         <p:spPr>
           <a:xfrm>
-            <a:off x="787380" y="5067300"/>
-            <a:ext cx="2920926" cy="266700"/>
+            <a:off x="787380" y="4699000"/>
+            <a:ext cx="3301917" cy="266700"/>
           </a:xfrm>
           <a:prstGeom prst="rect">
             <a:avLst/>
@@ -3356,7 +3356,7 @@
         </p:nvSpPr>
         <p:spPr>
           <a:xfrm>
-            <a:off x="787380" y="5422900"/>
+            <a:off x="787380" y="5016500"/>
             <a:ext cx="1523961" cy="228600"/>
           </a:xfrm>
           <a:prstGeom prst="rect">
@@ -3383,25 +3383,51 @@
           </a:p>
         </p:txBody>
       </p:sp>
-      <p:sp>
-        <p:nvSpPr>
-          <p:cNvPr id="9" name="Oval 8"/>
+      <p:pic>
+        <p:nvPicPr>
+          <p:cNvPr id="9" name="Picture 8" descr="hsl_final_result.png"/>
+          <p:cNvPicPr>
+            <a:picLocks noChangeAspect="1"/>
+          </p:cNvPicPr>
+          <p:nvPr/>
+        </p:nvPicPr>
+        <p:blipFill>
+          <a:blip r:embed="rId2"/>
+          <a:stretch>
+            <a:fillRect/>
+          </a:stretch>
+        </p:blipFill>
+        <p:spPr>
+          <a:xfrm>
+            <a:off x="5907206" y="1016000"/>
+            <a:ext cx="5012666" cy="3333750"/>
+          </a:xfrm>
+          <a:prstGeom prst="rect">
+            <a:avLst/>
+          </a:prstGeom>
+        </p:spPr>
+      </p:pic>
+      <p:sp>
+        <p:nvSpPr>
+          <p:cNvPr id="10" name="Rectangle 9"/>
           <p:cNvSpPr/>
           <p:nvPr/>
         </p:nvSpPr>
         <p:spPr>
           <a:xfrm>
-            <a:off x="6603834" y="1831974"/>
-            <a:ext cx="184145" cy="184150"/>
-          </a:xfrm>
-          <a:prstGeom prst="ellipse">
+            <a:off x="5905352" y="1016000"/>
+            <a:ext cx="5016374" cy="3333750"/>
+          </a:xfrm>
+          <a:prstGeom prst="rect">
             <a:avLst/>
           </a:prstGeom>
           <a:solidFill>
-            <a:srgbClr val="365E9D"/>
+            <a:srgbClr val="FFFFFF"/>
           </a:solidFill>
-          <a:ln>
-            <a:noFill/>
+          <a:ln w="12700">
+            <a:solidFill>
+              <a:srgbClr val="C8C2B4"/>
+            </a:solidFill>
           </a:ln>
         </p:spPr>
         <p:style>
@@ -3428,1218 +3454,14 @@
       </p:sp>
       <p:sp>
         <p:nvSpPr>
-          <p:cNvPr id="10" name="Oval 9"/>
-          <p:cNvSpPr/>
-          <p:nvPr/>
-        </p:nvSpPr>
-        <p:spPr>
-          <a:xfrm>
-            <a:off x="7248343" y="1555750"/>
-            <a:ext cx="147316" cy="147319"/>
-          </a:xfrm>
-          <a:prstGeom prst="ellipse">
-            <a:avLst/>
-          </a:prstGeom>
-          <a:solidFill>
-            <a:srgbClr val="365E9D"/>
-          </a:solidFill>
-          <a:ln>
-            <a:noFill/>
-          </a:ln>
-        </p:spPr>
-        <p:style>
-          <a:lnRef idx="1">
-            <a:schemeClr val="accent1"/>
-          </a:lnRef>
-          <a:fillRef idx="3">
-            <a:schemeClr val="accent1"/>
-          </a:fillRef>
-          <a:effectRef idx="2">
-            <a:schemeClr val="accent1"/>
-          </a:effectRef>
-          <a:fontRef idx="minor">
-            <a:schemeClr val="lt1"/>
-          </a:fontRef>
-        </p:style>
-        <p:txBody>
-          <a:bodyPr rtlCol="0" anchor="ctr"/>
-          <a:lstStyle/>
-          <a:p>
-            <a:pPr algn="ctr"/>
-          </a:p>
-        </p:txBody>
-      </p:sp>
-      <p:sp>
-        <p:nvSpPr>
-          <p:cNvPr id="11" name="Oval 10"/>
-          <p:cNvSpPr/>
-          <p:nvPr/>
-        </p:nvSpPr>
-        <p:spPr>
-          <a:xfrm>
-            <a:off x="7938889" y="1776730"/>
-            <a:ext cx="202559" cy="202565"/>
-          </a:xfrm>
-          <a:prstGeom prst="ellipse">
-            <a:avLst/>
-          </a:prstGeom>
-          <a:solidFill>
-            <a:srgbClr val="365E9D"/>
-          </a:solidFill>
-          <a:ln>
-            <a:noFill/>
-          </a:ln>
-        </p:spPr>
-        <p:style>
-          <a:lnRef idx="1">
-            <a:schemeClr val="accent1"/>
-          </a:lnRef>
-          <a:fillRef idx="3">
-            <a:schemeClr val="accent1"/>
-          </a:fillRef>
-          <a:effectRef idx="2">
-            <a:schemeClr val="accent1"/>
-          </a:effectRef>
-          <a:fontRef idx="minor">
-            <a:schemeClr val="lt1"/>
-          </a:fontRef>
-        </p:style>
-        <p:txBody>
-          <a:bodyPr rtlCol="0" anchor="ctr"/>
-          <a:lstStyle/>
-          <a:p>
-            <a:pPr algn="ctr"/>
-          </a:p>
-        </p:txBody>
-      </p:sp>
-      <p:sp>
-        <p:nvSpPr>
-          <p:cNvPr id="12" name="Oval 11"/>
-          <p:cNvSpPr/>
-          <p:nvPr/>
-        </p:nvSpPr>
-        <p:spPr>
-          <a:xfrm>
-            <a:off x="8537361" y="1583372"/>
-            <a:ext cx="119694" cy="119697"/>
-          </a:xfrm>
-          <a:prstGeom prst="ellipse">
-            <a:avLst/>
-          </a:prstGeom>
-          <a:solidFill>
-            <a:srgbClr val="365E9D"/>
-          </a:solidFill>
-          <a:ln>
-            <a:noFill/>
-          </a:ln>
-        </p:spPr>
-        <p:style>
-          <a:lnRef idx="1">
-            <a:schemeClr val="accent1"/>
-          </a:lnRef>
-          <a:fillRef idx="3">
-            <a:schemeClr val="accent1"/>
-          </a:fillRef>
-          <a:effectRef idx="2">
-            <a:schemeClr val="accent1"/>
-          </a:effectRef>
-          <a:fontRef idx="minor">
-            <a:schemeClr val="lt1"/>
-          </a:fontRef>
-        </p:style>
-        <p:txBody>
-          <a:bodyPr rtlCol="0" anchor="ctr"/>
-          <a:lstStyle/>
-          <a:p>
-            <a:pPr algn="ctr"/>
-          </a:p>
-        </p:txBody>
-      </p:sp>
-      <p:sp>
-        <p:nvSpPr>
-          <p:cNvPr id="13" name="Oval 12"/>
-          <p:cNvSpPr/>
-          <p:nvPr/>
-        </p:nvSpPr>
-        <p:spPr>
-          <a:xfrm>
-            <a:off x="9227906" y="1942465"/>
-            <a:ext cx="165730" cy="165735"/>
-          </a:xfrm>
-          <a:prstGeom prst="ellipse">
-            <a:avLst/>
-          </a:prstGeom>
-          <a:solidFill>
-            <a:srgbClr val="365E9D"/>
-          </a:solidFill>
-          <a:ln>
-            <a:noFill/>
-          </a:ln>
-        </p:spPr>
-        <p:style>
-          <a:lnRef idx="1">
-            <a:schemeClr val="accent1"/>
-          </a:lnRef>
-          <a:fillRef idx="3">
-            <a:schemeClr val="accent1"/>
-          </a:fillRef>
-          <a:effectRef idx="2">
-            <a:schemeClr val="accent1"/>
-          </a:effectRef>
-          <a:fontRef idx="minor">
-            <a:schemeClr val="lt1"/>
-          </a:fontRef>
-        </p:style>
-        <p:txBody>
-          <a:bodyPr rtlCol="0" anchor="ctr"/>
-          <a:lstStyle/>
-          <a:p>
-            <a:pPr algn="ctr"/>
-          </a:p>
-        </p:txBody>
-      </p:sp>
-      <p:sp>
-        <p:nvSpPr>
-          <p:cNvPr id="14" name="Oval 13"/>
-          <p:cNvSpPr/>
-          <p:nvPr/>
-        </p:nvSpPr>
-        <p:spPr>
-          <a:xfrm>
-            <a:off x="9780342" y="1703069"/>
-            <a:ext cx="239389" cy="239394"/>
-          </a:xfrm>
-          <a:prstGeom prst="ellipse">
-            <a:avLst/>
-          </a:prstGeom>
-          <a:solidFill>
-            <a:srgbClr val="365E9D"/>
-          </a:solidFill>
-          <a:ln>
-            <a:noFill/>
-          </a:ln>
-        </p:spPr>
-        <p:style>
-          <a:lnRef idx="1">
-            <a:schemeClr val="accent1"/>
-          </a:lnRef>
-          <a:fillRef idx="3">
-            <a:schemeClr val="accent1"/>
-          </a:fillRef>
-          <a:effectRef idx="2">
-            <a:schemeClr val="accent1"/>
-          </a:effectRef>
-          <a:fontRef idx="minor">
-            <a:schemeClr val="lt1"/>
-          </a:fontRef>
-        </p:style>
-        <p:txBody>
-          <a:bodyPr rtlCol="0" anchor="ctr"/>
-          <a:lstStyle/>
-          <a:p>
-            <a:pPr algn="ctr"/>
-          </a:p>
-        </p:txBody>
-      </p:sp>
-      <p:sp>
-        <p:nvSpPr>
-          <p:cNvPr id="15" name="Oval 14"/>
-          <p:cNvSpPr/>
-          <p:nvPr/>
-        </p:nvSpPr>
-        <p:spPr>
-          <a:xfrm>
-            <a:off x="10470888" y="1887220"/>
-            <a:ext cx="138109" cy="138112"/>
-          </a:xfrm>
-          <a:prstGeom prst="ellipse">
-            <a:avLst/>
-          </a:prstGeom>
-          <a:solidFill>
-            <a:srgbClr val="365E9D"/>
-          </a:solidFill>
-          <a:ln>
-            <a:noFill/>
-          </a:ln>
-        </p:spPr>
-        <p:style>
-          <a:lnRef idx="1">
-            <a:schemeClr val="accent1"/>
-          </a:lnRef>
-          <a:fillRef idx="3">
-            <a:schemeClr val="accent1"/>
-          </a:fillRef>
-          <a:effectRef idx="2">
-            <a:schemeClr val="accent1"/>
-          </a:effectRef>
-          <a:fontRef idx="minor">
-            <a:schemeClr val="lt1"/>
-          </a:fontRef>
-        </p:style>
-        <p:txBody>
-          <a:bodyPr rtlCol="0" anchor="ctr"/>
-          <a:lstStyle/>
-          <a:p>
-            <a:pPr algn="ctr"/>
-          </a:p>
-        </p:txBody>
-      </p:sp>
-      <p:sp>
-        <p:nvSpPr>
-          <p:cNvPr id="16" name="Oval 15"/>
-          <p:cNvSpPr/>
-          <p:nvPr/>
-        </p:nvSpPr>
-        <p:spPr>
-          <a:xfrm>
-            <a:off x="6953711" y="2642235"/>
-            <a:ext cx="239389" cy="239394"/>
-          </a:xfrm>
-          <a:prstGeom prst="ellipse">
-            <a:avLst/>
-          </a:prstGeom>
-          <a:solidFill>
-            <a:srgbClr val="365E9D"/>
-          </a:solidFill>
-          <a:ln>
-            <a:noFill/>
-          </a:ln>
-        </p:spPr>
-        <p:style>
-          <a:lnRef idx="1">
-            <a:schemeClr val="accent1"/>
-          </a:lnRef>
-          <a:fillRef idx="3">
-            <a:schemeClr val="accent1"/>
-          </a:fillRef>
-          <a:effectRef idx="2">
-            <a:schemeClr val="accent1"/>
-          </a:effectRef>
-          <a:fontRef idx="minor">
-            <a:schemeClr val="lt1"/>
-          </a:fontRef>
-        </p:style>
-        <p:txBody>
-          <a:bodyPr rtlCol="0" anchor="ctr"/>
-          <a:lstStyle/>
-          <a:p>
-            <a:pPr algn="ctr"/>
-          </a:p>
-        </p:txBody>
-      </p:sp>
-      <p:sp>
-        <p:nvSpPr>
-          <p:cNvPr id="17" name="Oval 16"/>
-          <p:cNvSpPr/>
-          <p:nvPr/>
-        </p:nvSpPr>
-        <p:spPr>
-          <a:xfrm>
-            <a:off x="7662670" y="2402839"/>
-            <a:ext cx="165730" cy="165735"/>
-          </a:xfrm>
-          <a:prstGeom prst="ellipse">
-            <a:avLst/>
-          </a:prstGeom>
-          <a:solidFill>
-            <a:srgbClr val="365E9D"/>
-          </a:solidFill>
-          <a:ln>
-            <a:noFill/>
-          </a:ln>
-        </p:spPr>
-        <p:style>
-          <a:lnRef idx="1">
-            <a:schemeClr val="accent1"/>
-          </a:lnRef>
-          <a:fillRef idx="3">
-            <a:schemeClr val="accent1"/>
-          </a:fillRef>
-          <a:effectRef idx="2">
-            <a:schemeClr val="accent1"/>
-          </a:effectRef>
-          <a:fontRef idx="minor">
-            <a:schemeClr val="lt1"/>
-          </a:fontRef>
-        </p:style>
-        <p:txBody>
-          <a:bodyPr rtlCol="0" anchor="ctr"/>
-          <a:lstStyle/>
-          <a:p>
-            <a:pPr algn="ctr"/>
-          </a:p>
-        </p:txBody>
-      </p:sp>
-      <p:sp>
-        <p:nvSpPr>
-          <p:cNvPr id="18" name="Oval 17"/>
-          <p:cNvSpPr/>
-          <p:nvPr/>
-        </p:nvSpPr>
-        <p:spPr>
-          <a:xfrm>
-            <a:off x="8307179" y="2798762"/>
-            <a:ext cx="202559" cy="202565"/>
-          </a:xfrm>
-          <a:prstGeom prst="ellipse">
-            <a:avLst/>
-          </a:prstGeom>
-          <a:solidFill>
-            <a:srgbClr val="365E9D"/>
-          </a:solidFill>
-          <a:ln>
-            <a:noFill/>
-          </a:ln>
-        </p:spPr>
-        <p:style>
-          <a:lnRef idx="1">
-            <a:schemeClr val="accent1"/>
-          </a:lnRef>
-          <a:fillRef idx="3">
-            <a:schemeClr val="accent1"/>
-          </a:fillRef>
-          <a:effectRef idx="2">
-            <a:schemeClr val="accent1"/>
-          </a:effectRef>
-          <a:fontRef idx="minor">
-            <a:schemeClr val="lt1"/>
-          </a:fontRef>
-        </p:style>
-        <p:txBody>
-          <a:bodyPr rtlCol="0" anchor="ctr"/>
-          <a:lstStyle/>
-          <a:p>
-            <a:pPr algn="ctr"/>
-          </a:p>
-        </p:txBody>
-      </p:sp>
-      <p:sp>
-        <p:nvSpPr>
-          <p:cNvPr id="19" name="Oval 18"/>
-          <p:cNvSpPr/>
-          <p:nvPr/>
-        </p:nvSpPr>
-        <p:spPr>
-          <a:xfrm>
-            <a:off x="8951688" y="2522537"/>
-            <a:ext cx="128901" cy="128905"/>
-          </a:xfrm>
-          <a:prstGeom prst="ellipse">
-            <a:avLst/>
-          </a:prstGeom>
-          <a:solidFill>
-            <a:srgbClr val="365E9D"/>
-          </a:solidFill>
-          <a:ln>
-            <a:noFill/>
-          </a:ln>
-        </p:spPr>
-        <p:style>
-          <a:lnRef idx="1">
-            <a:schemeClr val="accent1"/>
-          </a:lnRef>
-          <a:fillRef idx="3">
-            <a:schemeClr val="accent1"/>
-          </a:fillRef>
-          <a:effectRef idx="2">
-            <a:schemeClr val="accent1"/>
-          </a:effectRef>
-          <a:fontRef idx="minor">
-            <a:schemeClr val="lt1"/>
-          </a:fontRef>
-        </p:style>
-        <p:txBody>
-          <a:bodyPr rtlCol="0" anchor="ctr"/>
-          <a:lstStyle/>
-          <a:p>
-            <a:pPr algn="ctr"/>
-          </a:p>
-        </p:txBody>
-      </p:sp>
-      <p:sp>
-        <p:nvSpPr>
-          <p:cNvPr id="20" name="Oval 19"/>
-          <p:cNvSpPr/>
-          <p:nvPr/>
-        </p:nvSpPr>
-        <p:spPr>
-          <a:xfrm>
-            <a:off x="9642233" y="2752725"/>
-            <a:ext cx="193352" cy="193357"/>
-          </a:xfrm>
-          <a:prstGeom prst="ellipse">
-            <a:avLst/>
-          </a:prstGeom>
-          <a:solidFill>
-            <a:srgbClr val="365E9D"/>
-          </a:solidFill>
-          <a:ln>
-            <a:noFill/>
-          </a:ln>
-        </p:spPr>
-        <p:style>
-          <a:lnRef idx="1">
-            <a:schemeClr val="accent1"/>
-          </a:lnRef>
-          <a:fillRef idx="3">
-            <a:schemeClr val="accent1"/>
-          </a:fillRef>
-          <a:effectRef idx="2">
-            <a:schemeClr val="accent1"/>
-          </a:effectRef>
-          <a:fontRef idx="minor">
-            <a:schemeClr val="lt1"/>
-          </a:fontRef>
-        </p:style>
-        <p:txBody>
-          <a:bodyPr rtlCol="0" anchor="ctr"/>
-          <a:lstStyle/>
-          <a:p>
-            <a:pPr algn="ctr"/>
-          </a:p>
-        </p:txBody>
-      </p:sp>
-      <p:sp>
-        <p:nvSpPr>
-          <p:cNvPr id="21" name="Oval 20"/>
-          <p:cNvSpPr/>
-          <p:nvPr/>
-        </p:nvSpPr>
-        <p:spPr>
-          <a:xfrm>
-            <a:off x="10286742" y="2458085"/>
-            <a:ext cx="156523" cy="156527"/>
-          </a:xfrm>
-          <a:prstGeom prst="ellipse">
-            <a:avLst/>
-          </a:prstGeom>
-          <a:solidFill>
-            <a:srgbClr val="365E9D"/>
-          </a:solidFill>
-          <a:ln>
-            <a:noFill/>
-          </a:ln>
-        </p:spPr>
-        <p:style>
-          <a:lnRef idx="1">
-            <a:schemeClr val="accent1"/>
-          </a:lnRef>
-          <a:fillRef idx="3">
-            <a:schemeClr val="accent1"/>
-          </a:fillRef>
-          <a:effectRef idx="2">
-            <a:schemeClr val="accent1"/>
-          </a:effectRef>
-          <a:fontRef idx="minor">
-            <a:schemeClr val="lt1"/>
-          </a:fontRef>
-        </p:style>
-        <p:txBody>
-          <a:bodyPr rtlCol="0" anchor="ctr"/>
-          <a:lstStyle/>
-          <a:p>
-            <a:pPr algn="ctr"/>
-          </a:p>
-        </p:txBody>
-      </p:sp>
-      <p:sp>
-        <p:nvSpPr>
-          <p:cNvPr id="22" name="Oval 21"/>
-          <p:cNvSpPr/>
-          <p:nvPr/>
-        </p:nvSpPr>
-        <p:spPr>
-          <a:xfrm>
-            <a:off x="7202307" y="3535362"/>
-            <a:ext cx="165730" cy="165735"/>
-          </a:xfrm>
-          <a:prstGeom prst="ellipse">
-            <a:avLst/>
-          </a:prstGeom>
-          <a:solidFill>
-            <a:srgbClr val="365E9D"/>
-          </a:solidFill>
-          <a:ln>
-            <a:noFill/>
-          </a:ln>
-        </p:spPr>
-        <p:style>
-          <a:lnRef idx="1">
-            <a:schemeClr val="accent1"/>
-          </a:lnRef>
-          <a:fillRef idx="3">
-            <a:schemeClr val="accent1"/>
-          </a:fillRef>
-          <a:effectRef idx="2">
-            <a:schemeClr val="accent1"/>
-          </a:effectRef>
-          <a:fontRef idx="minor">
-            <a:schemeClr val="lt1"/>
-          </a:fontRef>
-        </p:style>
-        <p:txBody>
-          <a:bodyPr rtlCol="0" anchor="ctr"/>
-          <a:lstStyle/>
-          <a:p>
-            <a:pPr algn="ctr"/>
-          </a:p>
-        </p:txBody>
-      </p:sp>
-      <p:sp>
-        <p:nvSpPr>
-          <p:cNvPr id="23" name="Oval 22"/>
-          <p:cNvSpPr/>
-          <p:nvPr/>
-        </p:nvSpPr>
-        <p:spPr>
-          <a:xfrm>
-            <a:off x="7892852" y="3857625"/>
-            <a:ext cx="239389" cy="239394"/>
-          </a:xfrm>
-          <a:prstGeom prst="ellipse">
-            <a:avLst/>
-          </a:prstGeom>
-          <a:solidFill>
-            <a:srgbClr val="365E9D"/>
-          </a:solidFill>
-          <a:ln>
-            <a:noFill/>
-          </a:ln>
-        </p:spPr>
-        <p:style>
-          <a:lnRef idx="1">
-            <a:schemeClr val="accent1"/>
-          </a:lnRef>
-          <a:fillRef idx="3">
-            <a:schemeClr val="accent1"/>
-          </a:fillRef>
-          <a:effectRef idx="2">
-            <a:schemeClr val="accent1"/>
-          </a:effectRef>
-          <a:fontRef idx="minor">
-            <a:schemeClr val="lt1"/>
-          </a:fontRef>
-        </p:style>
-        <p:txBody>
-          <a:bodyPr rtlCol="0" anchor="ctr"/>
-          <a:lstStyle/>
-          <a:p>
-            <a:pPr algn="ctr"/>
-          </a:p>
-        </p:txBody>
-      </p:sp>
-      <p:sp>
-        <p:nvSpPr>
-          <p:cNvPr id="24" name="Oval 23"/>
-          <p:cNvSpPr/>
-          <p:nvPr/>
-        </p:nvSpPr>
-        <p:spPr>
-          <a:xfrm>
-            <a:off x="8767543" y="3581400"/>
-            <a:ext cx="147316" cy="147319"/>
-          </a:xfrm>
-          <a:prstGeom prst="ellipse">
-            <a:avLst/>
-          </a:prstGeom>
-          <a:solidFill>
-            <a:srgbClr val="365E9D"/>
-          </a:solidFill>
-          <a:ln>
-            <a:noFill/>
-          </a:ln>
-        </p:spPr>
-        <p:style>
-          <a:lnRef idx="1">
-            <a:schemeClr val="accent1"/>
-          </a:lnRef>
-          <a:fillRef idx="3">
-            <a:schemeClr val="accent1"/>
-          </a:fillRef>
-          <a:effectRef idx="2">
-            <a:schemeClr val="accent1"/>
-          </a:effectRef>
-          <a:fontRef idx="minor">
-            <a:schemeClr val="lt1"/>
-          </a:fontRef>
-        </p:style>
-        <p:txBody>
-          <a:bodyPr rtlCol="0" anchor="ctr"/>
-          <a:lstStyle/>
-          <a:p>
-            <a:pPr algn="ctr"/>
-          </a:p>
-        </p:txBody>
-      </p:sp>
-      <p:sp>
-        <p:nvSpPr>
-          <p:cNvPr id="25" name="Oval 24"/>
-          <p:cNvSpPr/>
-          <p:nvPr/>
-        </p:nvSpPr>
-        <p:spPr>
-          <a:xfrm>
-            <a:off x="9458088" y="3949700"/>
-            <a:ext cx="211767" cy="211772"/>
-          </a:xfrm>
-          <a:prstGeom prst="ellipse">
-            <a:avLst/>
-          </a:prstGeom>
-          <a:solidFill>
-            <a:srgbClr val="365E9D"/>
-          </a:solidFill>
-          <a:ln>
-            <a:noFill/>
-          </a:ln>
-        </p:spPr>
-        <p:style>
-          <a:lnRef idx="1">
-            <a:schemeClr val="accent1"/>
-          </a:lnRef>
-          <a:fillRef idx="3">
-            <a:schemeClr val="accent1"/>
-          </a:fillRef>
-          <a:effectRef idx="2">
-            <a:schemeClr val="accent1"/>
-          </a:effectRef>
-          <a:fontRef idx="minor">
-            <a:schemeClr val="lt1"/>
-          </a:fontRef>
-        </p:style>
-        <p:txBody>
-          <a:bodyPr rtlCol="0" anchor="ctr"/>
-          <a:lstStyle/>
-          <a:p>
-            <a:pPr algn="ctr"/>
-          </a:p>
-        </p:txBody>
-      </p:sp>
-      <p:sp>
-        <p:nvSpPr>
-          <p:cNvPr id="26" name="Oval 25"/>
-          <p:cNvSpPr/>
-          <p:nvPr/>
-        </p:nvSpPr>
-        <p:spPr>
-          <a:xfrm>
-            <a:off x="10240706" y="3673474"/>
-            <a:ext cx="165730" cy="165735"/>
-          </a:xfrm>
-          <a:prstGeom prst="ellipse">
-            <a:avLst/>
-          </a:prstGeom>
-          <a:solidFill>
-            <a:srgbClr val="365E9D"/>
-          </a:solidFill>
-          <a:ln>
-            <a:noFill/>
-          </a:ln>
-        </p:spPr>
-        <p:style>
-          <a:lnRef idx="1">
-            <a:schemeClr val="accent1"/>
-          </a:lnRef>
-          <a:fillRef idx="3">
-            <a:schemeClr val="accent1"/>
-          </a:fillRef>
-          <a:effectRef idx="2">
-            <a:schemeClr val="accent1"/>
-          </a:effectRef>
-          <a:fontRef idx="minor">
-            <a:schemeClr val="lt1"/>
-          </a:fontRef>
-        </p:style>
-        <p:txBody>
-          <a:bodyPr rtlCol="0" anchor="ctr"/>
-          <a:lstStyle/>
-          <a:p>
-            <a:pPr algn="ctr"/>
-          </a:p>
-        </p:txBody>
-      </p:sp>
-      <p:sp>
-        <p:nvSpPr>
-          <p:cNvPr id="27" name="Oval 26"/>
-          <p:cNvSpPr/>
-          <p:nvPr/>
-        </p:nvSpPr>
-        <p:spPr>
-          <a:xfrm>
-            <a:off x="7524561" y="4732337"/>
-            <a:ext cx="202559" cy="202565"/>
-          </a:xfrm>
-          <a:prstGeom prst="ellipse">
-            <a:avLst/>
-          </a:prstGeom>
-          <a:solidFill>
-            <a:srgbClr val="365E9D"/>
-          </a:solidFill>
-          <a:ln>
-            <a:noFill/>
-          </a:ln>
-        </p:spPr>
-        <p:style>
-          <a:lnRef idx="1">
-            <a:schemeClr val="accent1"/>
-          </a:lnRef>
-          <a:fillRef idx="3">
-            <a:schemeClr val="accent1"/>
-          </a:fillRef>
-          <a:effectRef idx="2">
-            <a:schemeClr val="accent1"/>
-          </a:effectRef>
-          <a:fontRef idx="minor">
-            <a:schemeClr val="lt1"/>
-          </a:fontRef>
-        </p:style>
-        <p:txBody>
-          <a:bodyPr rtlCol="0" anchor="ctr"/>
-          <a:lstStyle/>
-          <a:p>
-            <a:pPr algn="ctr"/>
-          </a:p>
-        </p:txBody>
-      </p:sp>
-      <p:sp>
-        <p:nvSpPr>
-          <p:cNvPr id="28" name="Oval 27"/>
-          <p:cNvSpPr/>
-          <p:nvPr/>
-        </p:nvSpPr>
-        <p:spPr>
-          <a:xfrm>
-            <a:off x="8537361" y="4870450"/>
-            <a:ext cx="147316" cy="147319"/>
-          </a:xfrm>
-          <a:prstGeom prst="ellipse">
-            <a:avLst/>
-          </a:prstGeom>
-          <a:solidFill>
-            <a:srgbClr val="365E9D"/>
-          </a:solidFill>
-          <a:ln>
-            <a:noFill/>
-          </a:ln>
-        </p:spPr>
-        <p:style>
-          <a:lnRef idx="1">
-            <a:schemeClr val="accent1"/>
-          </a:lnRef>
-          <a:fillRef idx="3">
-            <a:schemeClr val="accent1"/>
-          </a:fillRef>
-          <a:effectRef idx="2">
-            <a:schemeClr val="accent1"/>
-          </a:effectRef>
-          <a:fontRef idx="minor">
-            <a:schemeClr val="lt1"/>
-          </a:fontRef>
-        </p:style>
-        <p:txBody>
-          <a:bodyPr rtlCol="0" anchor="ctr"/>
-          <a:lstStyle/>
-          <a:p>
-            <a:pPr algn="ctr"/>
-          </a:p>
-        </p:txBody>
-      </p:sp>
-      <p:sp>
-        <p:nvSpPr>
-          <p:cNvPr id="29" name="Oval 28"/>
-          <p:cNvSpPr/>
-          <p:nvPr/>
-        </p:nvSpPr>
-        <p:spPr>
-          <a:xfrm>
-            <a:off x="9596197" y="4686300"/>
-            <a:ext cx="220974" cy="220980"/>
-          </a:xfrm>
-          <a:prstGeom prst="ellipse">
-            <a:avLst/>
-          </a:prstGeom>
-          <a:solidFill>
-            <a:srgbClr val="365E9D"/>
-          </a:solidFill>
-          <a:ln>
-            <a:noFill/>
-          </a:ln>
-        </p:spPr>
-        <p:style>
-          <a:lnRef idx="1">
-            <a:schemeClr val="accent1"/>
-          </a:lnRef>
-          <a:fillRef idx="3">
-            <a:schemeClr val="accent1"/>
-          </a:fillRef>
-          <a:effectRef idx="2">
-            <a:schemeClr val="accent1"/>
-          </a:effectRef>
-          <a:fontRef idx="minor">
-            <a:schemeClr val="lt1"/>
-          </a:fontRef>
-        </p:style>
-        <p:txBody>
-          <a:bodyPr rtlCol="0" anchor="ctr"/>
-          <a:lstStyle/>
-          <a:p>
-            <a:pPr algn="ctr"/>
-          </a:p>
-        </p:txBody>
-      </p:sp>
-      <p:sp>
-        <p:nvSpPr>
-          <p:cNvPr id="30" name="Oval 29"/>
-          <p:cNvSpPr/>
-          <p:nvPr/>
-        </p:nvSpPr>
-        <p:spPr>
-          <a:xfrm>
-            <a:off x="8721506" y="2982912"/>
-            <a:ext cx="294632" cy="294639"/>
-          </a:xfrm>
-          <a:prstGeom prst="ellipse">
-            <a:avLst/>
-          </a:prstGeom>
-          <a:solidFill>
-            <a:srgbClr val="D7613D"/>
-          </a:solidFill>
-          <a:ln>
-            <a:noFill/>
-          </a:ln>
-        </p:spPr>
-        <p:style>
-          <a:lnRef idx="1">
-            <a:schemeClr val="accent1"/>
-          </a:lnRef>
-          <a:fillRef idx="3">
-            <a:schemeClr val="accent1"/>
-          </a:fillRef>
-          <a:effectRef idx="2">
-            <a:schemeClr val="accent1"/>
-          </a:effectRef>
-          <a:fontRef idx="minor">
-            <a:schemeClr val="lt1"/>
-          </a:fontRef>
-        </p:style>
-        <p:txBody>
-          <a:bodyPr rtlCol="0" anchor="ctr"/>
-          <a:lstStyle/>
-          <a:p>
-            <a:pPr algn="ctr"/>
-          </a:p>
-        </p:txBody>
-      </p:sp>
-      <p:sp>
-        <p:nvSpPr>
-          <p:cNvPr id="31" name="Oval 30"/>
-          <p:cNvSpPr/>
-          <p:nvPr/>
-        </p:nvSpPr>
-        <p:spPr>
-          <a:xfrm>
-            <a:off x="9135834" y="2890837"/>
-            <a:ext cx="202559" cy="202565"/>
-          </a:xfrm>
-          <a:prstGeom prst="ellipse">
-            <a:avLst/>
-          </a:prstGeom>
-          <a:solidFill>
-            <a:srgbClr val="D7613D"/>
-          </a:solidFill>
-          <a:ln>
-            <a:noFill/>
-          </a:ln>
-        </p:spPr>
-        <p:style>
-          <a:lnRef idx="1">
-            <a:schemeClr val="accent1"/>
-          </a:lnRef>
-          <a:fillRef idx="3">
-            <a:schemeClr val="accent1"/>
-          </a:fillRef>
-          <a:effectRef idx="2">
-            <a:schemeClr val="accent1"/>
-          </a:effectRef>
-          <a:fontRef idx="minor">
-            <a:schemeClr val="lt1"/>
-          </a:fontRef>
-        </p:style>
-        <p:txBody>
-          <a:bodyPr rtlCol="0" anchor="ctr"/>
-          <a:lstStyle/>
-          <a:p>
-            <a:pPr algn="ctr"/>
-          </a:p>
-        </p:txBody>
-      </p:sp>
-      <p:sp>
-        <p:nvSpPr>
-          <p:cNvPr id="32" name="Oval 31"/>
-          <p:cNvSpPr/>
-          <p:nvPr/>
-        </p:nvSpPr>
-        <p:spPr>
-          <a:xfrm>
-            <a:off x="9504124" y="3167062"/>
-            <a:ext cx="257803" cy="257810"/>
-          </a:xfrm>
-          <a:prstGeom prst="ellipse">
-            <a:avLst/>
-          </a:prstGeom>
-          <a:solidFill>
-            <a:srgbClr val="D7613D"/>
-          </a:solidFill>
-          <a:ln>
-            <a:noFill/>
-          </a:ln>
-        </p:spPr>
-        <p:style>
-          <a:lnRef idx="1">
-            <a:schemeClr val="accent1"/>
-          </a:lnRef>
-          <a:fillRef idx="3">
-            <a:schemeClr val="accent1"/>
-          </a:fillRef>
-          <a:effectRef idx="2">
-            <a:schemeClr val="accent1"/>
-          </a:effectRef>
-          <a:fontRef idx="minor">
-            <a:schemeClr val="lt1"/>
-          </a:fontRef>
-        </p:style>
-        <p:txBody>
-          <a:bodyPr rtlCol="0" anchor="ctr"/>
-          <a:lstStyle/>
-          <a:p>
-            <a:pPr algn="ctr"/>
-          </a:p>
-        </p:txBody>
-      </p:sp>
-      <p:sp>
-        <p:nvSpPr>
-          <p:cNvPr id="33" name="Oval 32"/>
-          <p:cNvSpPr/>
-          <p:nvPr/>
-        </p:nvSpPr>
-        <p:spPr>
-          <a:xfrm>
-            <a:off x="8905652" y="3443287"/>
-            <a:ext cx="220974" cy="220980"/>
-          </a:xfrm>
-          <a:prstGeom prst="ellipse">
-            <a:avLst/>
-          </a:prstGeom>
-          <a:solidFill>
-            <a:srgbClr val="D7613D"/>
-          </a:solidFill>
-          <a:ln>
-            <a:noFill/>
-          </a:ln>
-        </p:spPr>
-        <p:style>
-          <a:lnRef idx="1">
-            <a:schemeClr val="accent1"/>
-          </a:lnRef>
-          <a:fillRef idx="3">
-            <a:schemeClr val="accent1"/>
-          </a:fillRef>
-          <a:effectRef idx="2">
-            <a:schemeClr val="accent1"/>
-          </a:effectRef>
-          <a:fontRef idx="minor">
-            <a:schemeClr val="lt1"/>
-          </a:fontRef>
-        </p:style>
-        <p:txBody>
-          <a:bodyPr rtlCol="0" anchor="ctr"/>
-          <a:lstStyle/>
-          <a:p>
-            <a:pPr algn="ctr"/>
-          </a:p>
-        </p:txBody>
-      </p:sp>
-      <p:sp>
-        <p:nvSpPr>
-          <p:cNvPr id="34" name="Oval 33"/>
-          <p:cNvSpPr/>
-          <p:nvPr/>
-        </p:nvSpPr>
-        <p:spPr>
-          <a:xfrm>
-            <a:off x="9319979" y="3627437"/>
-            <a:ext cx="313047" cy="313055"/>
-          </a:xfrm>
-          <a:prstGeom prst="ellipse">
-            <a:avLst/>
-          </a:prstGeom>
-          <a:solidFill>
-            <a:srgbClr val="D7613D"/>
-          </a:solidFill>
-          <a:ln>
-            <a:noFill/>
-          </a:ln>
-        </p:spPr>
-        <p:style>
-          <a:lnRef idx="1">
-            <a:schemeClr val="accent1"/>
-          </a:lnRef>
-          <a:fillRef idx="3">
-            <a:schemeClr val="accent1"/>
-          </a:fillRef>
-          <a:effectRef idx="2">
-            <a:schemeClr val="accent1"/>
-          </a:effectRef>
-          <a:fontRef idx="minor">
-            <a:schemeClr val="lt1"/>
-          </a:fontRef>
-        </p:style>
-        <p:txBody>
-          <a:bodyPr rtlCol="0" anchor="ctr"/>
-          <a:lstStyle/>
-          <a:p>
-            <a:pPr algn="ctr"/>
-          </a:p>
-        </p:txBody>
-      </p:sp>
-      <p:sp>
-        <p:nvSpPr>
-          <p:cNvPr id="35" name="Oval 34"/>
-          <p:cNvSpPr/>
-          <p:nvPr/>
-        </p:nvSpPr>
-        <p:spPr>
-          <a:xfrm>
-            <a:off x="9780342" y="3489325"/>
-            <a:ext cx="184145" cy="184150"/>
-          </a:xfrm>
-          <a:prstGeom prst="ellipse">
-            <a:avLst/>
-          </a:prstGeom>
-          <a:solidFill>
-            <a:srgbClr val="D7613D"/>
-          </a:solidFill>
-          <a:ln>
-            <a:noFill/>
-          </a:ln>
-        </p:spPr>
-        <p:style>
-          <a:lnRef idx="1">
-            <a:schemeClr val="accent1"/>
-          </a:lnRef>
-          <a:fillRef idx="3">
-            <a:schemeClr val="accent1"/>
-          </a:fillRef>
-          <a:effectRef idx="2">
-            <a:schemeClr val="accent1"/>
-          </a:effectRef>
-          <a:fontRef idx="minor">
-            <a:schemeClr val="lt1"/>
-          </a:fontRef>
-        </p:style>
-        <p:txBody>
-          <a:bodyPr rtlCol="0" anchor="ctr"/>
-          <a:lstStyle/>
-          <a:p>
-            <a:pPr algn="ctr"/>
-          </a:p>
-        </p:txBody>
-      </p:sp>
-      <p:sp>
-        <p:nvSpPr>
-          <p:cNvPr id="36" name="Oval 35"/>
-          <p:cNvSpPr/>
-          <p:nvPr/>
-        </p:nvSpPr>
-        <p:spPr>
-          <a:xfrm>
-            <a:off x="9071383" y="4060189"/>
-            <a:ext cx="165730" cy="165735"/>
-          </a:xfrm>
-          <a:prstGeom prst="ellipse">
-            <a:avLst/>
-          </a:prstGeom>
-          <a:solidFill>
-            <a:srgbClr val="D7613D"/>
-          </a:solidFill>
-          <a:ln>
-            <a:noFill/>
-          </a:ln>
-        </p:spPr>
-        <p:style>
-          <a:lnRef idx="1">
-            <a:schemeClr val="accent1"/>
-          </a:lnRef>
-          <a:fillRef idx="3">
-            <a:schemeClr val="accent1"/>
-          </a:fillRef>
-          <a:effectRef idx="2">
-            <a:schemeClr val="accent1"/>
-          </a:effectRef>
-          <a:fontRef idx="minor">
-            <a:schemeClr val="lt1"/>
-          </a:fontRef>
-        </p:style>
-        <p:txBody>
-          <a:bodyPr rtlCol="0" anchor="ctr"/>
-          <a:lstStyle/>
-          <a:p>
-            <a:pPr algn="ctr"/>
-          </a:p>
-        </p:txBody>
-      </p:sp>
-      <p:sp>
-        <p:nvSpPr>
-          <p:cNvPr id="37" name="Oval 36"/>
-          <p:cNvSpPr/>
-          <p:nvPr/>
-        </p:nvSpPr>
-        <p:spPr>
-          <a:xfrm>
-            <a:off x="9596197" y="4179887"/>
-            <a:ext cx="211767" cy="211772"/>
-          </a:xfrm>
-          <a:prstGeom prst="ellipse">
-            <a:avLst/>
-          </a:prstGeom>
-          <a:solidFill>
-            <a:srgbClr val="D7613D"/>
-          </a:solidFill>
-          <a:ln>
-            <a:noFill/>
-          </a:ln>
-        </p:spPr>
-        <p:style>
-          <a:lnRef idx="1">
-            <a:schemeClr val="accent1"/>
-          </a:lnRef>
-          <a:fillRef idx="3">
-            <a:schemeClr val="accent1"/>
-          </a:fillRef>
-          <a:effectRef idx="2">
-            <a:schemeClr val="accent1"/>
-          </a:effectRef>
-          <a:fontRef idx="minor">
-            <a:schemeClr val="lt1"/>
-          </a:fontRef>
-        </p:style>
-        <p:txBody>
-          <a:bodyPr rtlCol="0" anchor="ctr"/>
-          <a:lstStyle/>
-          <a:p>
-            <a:pPr algn="ctr"/>
-          </a:p>
-        </p:txBody>
-      </p:sp>
-      <p:sp>
-        <p:nvSpPr>
-          <p:cNvPr id="38" name="TextBox 37"/>
+          <p:cNvPr id="11" name="TextBox 10"/>
           <p:cNvSpPr txBox="1"/>
           <p:nvPr/>
         </p:nvSpPr>
         <p:spPr>
           <a:xfrm>
-            <a:off x="6730831" y="5207000"/>
-            <a:ext cx="3301917" cy="285750"/>
+            <a:off x="5905352" y="4508500"/>
+            <a:ext cx="2476438" cy="215899"/>
           </a:xfrm>
           <a:prstGeom prst="rect">
             <a:avLst/>
@@ -4654,27 +3476,27 @@
           <a:p>
             <a:pPr algn="l"/>
             <a:r>
-              <a:rPr sz="2400" b="1">
-                <a:solidFill>
-                  <a:srgbClr val="111827"/>
+              <a:rPr sz="1900" b="1">
+                <a:solidFill>
+                  <a:srgbClr val="1F766F"/>
                 </a:solidFill>
                 <a:latin typeface="Aptos"/>
               </a:rPr>
-              <a:t>one merged point_cloud.ply</a:t>
-            </a:r>
-          </a:p>
-        </p:txBody>
-      </p:sp>
-      <p:sp>
-        <p:nvSpPr>
-          <p:cNvPr id="39" name="TextBox 38"/>
+              <a:t>final composed render</a:t>
+            </a:r>
+          </a:p>
+        </p:txBody>
+      </p:sp>
+      <p:sp>
+        <p:nvSpPr>
+          <p:cNvPr id="12" name="TextBox 11"/>
           <p:cNvSpPr txBox="1"/>
           <p:nvPr/>
         </p:nvSpPr>
         <p:spPr>
           <a:xfrm>
-            <a:off x="6730831" y="5486400"/>
-            <a:ext cx="3619409" cy="304800"/>
+            <a:off x="5905352" y="5016500"/>
+            <a:ext cx="3936901" cy="279400"/>
           </a:xfrm>
           <a:prstGeom prst="rect">
             <a:avLst/>
@@ -4689,13 +3511,48 @@
           <a:p>
             <a:pPr algn="l"/>
             <a:r>
-              <a:rPr sz="1800" b="0">
-                <a:solidFill>
-                  <a:srgbClr val="5F6B73"/>
+              <a:rPr sz="2700" b="1">
+                <a:solidFill>
+                  <a:srgbClr val="111827"/>
                 </a:solidFill>
                 <a:latin typeface="Aptos"/>
               </a:rPr>
-              <a:t>Render together to preserve splat depth and alpha ordering.</a:t>
+              <a:t>one merged point_cloud.ply</a:t>
+            </a:r>
+          </a:p>
+        </p:txBody>
+      </p:sp>
+      <p:sp>
+        <p:nvSpPr>
+          <p:cNvPr id="13" name="TextBox 12"/>
+          <p:cNvSpPr txBox="1"/>
+          <p:nvPr/>
+        </p:nvSpPr>
+        <p:spPr>
+          <a:xfrm>
+            <a:off x="5905352" y="5334000"/>
+            <a:ext cx="4444888" cy="444500"/>
+          </a:xfrm>
+          <a:prstGeom prst="rect">
+            <a:avLst/>
+          </a:prstGeom>
+          <a:noFill/>
+        </p:spPr>
+        <p:txBody>
+          <a:bodyPr wrap="square" lIns="0" rIns="0" tIns="0" bIns="0">
+            <a:spAutoFit/>
+          </a:bodyPr>
+          <a:lstStyle/>
+          <a:p>
+            <a:pPr algn="l"/>
+            <a:r>
+              <a:rPr sz="2100" b="0">
+                <a:solidFill>
+                  <a:srgbClr val="5F6B73"/>
+                </a:solidFill>
+                <a:latin typeface="Aptos"/>
+              </a:rPr>
+              <a:t>Rendered with Bicycle cameras for shared depth and alpha ordering.</a:t>
             </a:r>
           </a:p>
         </p:txBody>
@@ -4770,7 +3627,7 @@
         <p:spPr>
           <a:xfrm>
             <a:off x="698482" y="520700"/>
-            <a:ext cx="5079873" cy="495299"/>
+            <a:ext cx="5714857" cy="495299"/>
           </a:xfrm>
           <a:prstGeom prst="rect">
             <a:avLst/>
@@ -4805,7 +3662,7 @@
         <p:spPr>
           <a:xfrm>
             <a:off x="711182" y="952500"/>
-            <a:ext cx="6349841" cy="355600"/>
+            <a:ext cx="7492812" cy="355600"/>
           </a:xfrm>
           <a:prstGeom prst="rect">
             <a:avLst/>
@@ -4826,21 +3683,56 @@
                 </a:solidFill>
                 <a:latin typeface="Aptos"/>
               </a:rPr>
-              <a:t>The foreground asset is transformed in 3DGS parameter space, then rasterized with the scene in one pass.</a:t>
+              <a:t>The foreground asset is transformed in 3DGS parameter space, then merged before rendering.</a:t>
+            </a:r>
+          </a:p>
+        </p:txBody>
+      </p:sp>
+      <p:sp>
+        <p:nvSpPr>
+          <p:cNvPr id="5" name="TextBox 4"/>
+          <p:cNvSpPr txBox="1"/>
+          <p:nvPr/>
+        </p:nvSpPr>
+        <p:spPr>
+          <a:xfrm>
+            <a:off x="1587460" y="1778000"/>
+            <a:ext cx="6603834" cy="508000"/>
+          </a:xfrm>
+          <a:prstGeom prst="rect">
+            <a:avLst/>
+          </a:prstGeom>
+          <a:noFill/>
+        </p:spPr>
+        <p:txBody>
+          <a:bodyPr wrap="square" lIns="0" rIns="0" tIns="0" bIns="0">
+            <a:spAutoFit/>
+          </a:bodyPr>
+          <a:lstStyle/>
+          <a:p>
+            <a:pPr algn="ctr"/>
+            <a:r>
+              <a:rPr sz="4500" b="1">
+                <a:solidFill>
+                  <a:srgbClr val="111827"/>
+                </a:solidFill>
+                <a:latin typeface="Aptos"/>
+              </a:rPr>
+              <a:t>p_scene = s R p_asset + t</a:t>
             </a:r>
           </a:p>
         </p:txBody>
       </p:sp>
       <p:cxnSp>
         <p:nvCxnSpPr>
-          <p:cNvPr id="5" name="Connector 4"/>
+          <p:cNvPr id="6" name="Connector 5"/>
           <p:cNvCxnSpPr/>
           <p:nvPr/>
         </p:nvCxnSpPr>
         <p:spPr>
           <a:xfrm>
-            <a:off x="1142971" y="2349500"/>
-            <a:ext cx="9270768" cy="0"/>
+            <a:off x="1904952" y="2508250"/>
+            <a:ext cx="7746806" cy="0"/>
           </a:xfrm>
           <a:prstGeom prst="line">
             <a:avLst/>
@@ -4868,14 +3760,14 @@
       </p:cxnSp>
       <p:sp>
         <p:nvSpPr>
-          <p:cNvPr id="6" name="Oval 5"/>
+          <p:cNvPr id="7" name="Oval 6"/>
           <p:cNvSpPr/>
           <p:nvPr/>
         </p:nvSpPr>
         <p:spPr>
           <a:xfrm>
-            <a:off x="1587460" y="1854200"/>
-            <a:ext cx="952476" cy="952500"/>
+            <a:off x="1587460" y="2984500"/>
+            <a:ext cx="482587" cy="482600"/>
           </a:xfrm>
           <a:prstGeom prst="ellipse">
             <a:avLst/>
@@ -4911,14 +3803,14 @@
       </p:sp>
       <p:sp>
         <p:nvSpPr>
-          <p:cNvPr id="7" name="TextBox 6"/>
+          <p:cNvPr id="8" name="TextBox 7"/>
           <p:cNvSpPr txBox="1"/>
           <p:nvPr/>
         </p:nvSpPr>
         <p:spPr>
           <a:xfrm>
-            <a:off x="1435064" y="2171700"/>
-            <a:ext cx="1333466" cy="241300"/>
+            <a:off x="666733" y="3651250"/>
+            <a:ext cx="2349441" cy="266700"/>
           </a:xfrm>
           <a:prstGeom prst="rect">
             <a:avLst/>
@@ -4933,9 +3825,9 @@
           <a:p>
             <a:pPr algn="ctr"/>
             <a:r>
-              <a:rPr sz="2500" b="1">
-                <a:solidFill>
-                  <a:srgbClr val="FFFFFF"/>
+              <a:rPr sz="2900" b="1">
+                <a:solidFill>
+                  <a:srgbClr val="111827"/>
                 </a:solidFill>
                 <a:latin typeface="Aptos"/>
               </a:rPr>
@@ -4946,14 +3838,14 @@
       </p:sp>
       <p:sp>
         <p:nvSpPr>
-          <p:cNvPr id="8" name="TextBox 7"/>
+          <p:cNvPr id="9" name="TextBox 8"/>
           <p:cNvSpPr txBox="1"/>
           <p:nvPr/>
         </p:nvSpPr>
         <p:spPr>
           <a:xfrm>
-            <a:off x="571485" y="3301999"/>
-            <a:ext cx="2603434" cy="622300"/>
+            <a:off x="380990" y="4032249"/>
+            <a:ext cx="2984425" cy="635000"/>
           </a:xfrm>
           <a:prstGeom prst="rect">
             <a:avLst/>
@@ -4968,39 +3860,27 @@
           <a:p>
             <a:pPr algn="ctr"/>
             <a:r>
-              <a:rPr sz="2400" b="1">
-                <a:solidFill>
-                  <a:srgbClr val="111827"/>
+              <a:rPr sz="2200" b="0">
+                <a:solidFill>
+                  <a:srgbClr val="5F6B73"/>
                 </a:solidFill>
                 <a:latin typeface="Aptos"/>
               </a:rPr>
-              <a:t>Bicycle and chair</a:t>
-            </a:r>
-          </a:p>
-          <a:p>
-            <a:pPr algn="ctr"/>
-            <a:r>
-              <a:rPr sz="2400" b="1">
-                <a:solidFill>
-                  <a:srgbClr val="111827"/>
-                </a:solidFill>
-                <a:latin typeface="Aptos"/>
-              </a:rPr>
-              <a:t>as separate 3DGS models</a:t>
-            </a:r>
-          </a:p>
-        </p:txBody>
-      </p:sp>
-      <p:sp>
-        <p:nvSpPr>
-          <p:cNvPr id="9" name="Oval 8"/>
+              <a:t>Bicycle scene and chair asset as separate 3DGS models.</a:t>
+            </a:r>
+          </a:p>
+        </p:txBody>
+      </p:sp>
+      <p:sp>
+        <p:nvSpPr>
+          <p:cNvPr id="10" name="Oval 9"/>
           <p:cNvSpPr/>
           <p:nvPr/>
         </p:nvSpPr>
         <p:spPr>
           <a:xfrm>
-            <a:off x="5016374" y="1854200"/>
-            <a:ext cx="952476" cy="952500"/>
+            <a:off x="5016374" y="2984500"/>
+            <a:ext cx="482587" cy="482600"/>
           </a:xfrm>
           <a:prstGeom prst="ellipse">
             <a:avLst/>
@@ -5036,14 +3916,14 @@
       </p:sp>
       <p:sp>
         <p:nvSpPr>
-          <p:cNvPr id="10" name="TextBox 9"/>
+          <p:cNvPr id="11" name="TextBox 10"/>
           <p:cNvSpPr txBox="1"/>
           <p:nvPr/>
         </p:nvSpPr>
         <p:spPr>
           <a:xfrm>
-            <a:off x="4863978" y="2171700"/>
-            <a:ext cx="1333466" cy="241300"/>
+            <a:off x="4095647" y="3651250"/>
+            <a:ext cx="2349441" cy="266700"/>
           </a:xfrm>
           <a:prstGeom prst="rect">
             <a:avLst/>
@@ -5058,9 +3938,9 @@
           <a:p>
             <a:pPr algn="ctr"/>
             <a:r>
-              <a:rPr sz="2500" b="1">
-                <a:solidFill>
-                  <a:srgbClr val="FFFFFF"/>
+              <a:rPr sz="2900" b="1">
+                <a:solidFill>
+                  <a:srgbClr val="111827"/>
                 </a:solidFill>
                 <a:latin typeface="Aptos"/>
               </a:rPr>
@@ -5071,14 +3951,14 @@
       </p:sp>
       <p:sp>
         <p:nvSpPr>
-          <p:cNvPr id="11" name="TextBox 10"/>
+          <p:cNvPr id="12" name="TextBox 11"/>
           <p:cNvSpPr txBox="1"/>
           <p:nvPr/>
         </p:nvSpPr>
         <p:spPr>
           <a:xfrm>
-            <a:off x="4000399" y="3301999"/>
-            <a:ext cx="2603434" cy="622300"/>
+            <a:off x="3809904" y="4032249"/>
+            <a:ext cx="2984425" cy="635000"/>
           </a:xfrm>
           <a:prstGeom prst="rect">
             <a:avLst/>
@@ -5093,39 +3973,27 @@
           <a:p>
             <a:pPr algn="ctr"/>
             <a:r>
-              <a:rPr sz="2400" b="1">
-                <a:solidFill>
-                  <a:srgbClr val="111827"/>
+              <a:rPr sz="2200" b="0">
+                <a:solidFill>
+                  <a:srgbClr val="5F6B73"/>
                 </a:solidFill>
                 <a:latin typeface="Aptos"/>
               </a:rPr>
-              <a:t>p_scene = s R p_object + t</a:t>
-            </a:r>
-          </a:p>
-          <a:p>
-            <a:pPr algn="ctr"/>
-            <a:r>
-              <a:rPr sz="2400" b="1">
-                <a:solidFill>
-                  <a:srgbClr val="111827"/>
-                </a:solidFill>
-                <a:latin typeface="Aptos"/>
-              </a:rPr>
-              <a:t>log-scale and quaternion updates</a:t>
-            </a:r>
-          </a:p>
-        </p:txBody>
-      </p:sp>
-      <p:sp>
-        <p:nvSpPr>
-          <p:cNvPr id="12" name="Oval 11"/>
+              <a:t>Apply scale, rotation, and translation to every foreground Gaussian.</a:t>
+            </a:r>
+          </a:p>
+        </p:txBody>
+      </p:sp>
+      <p:sp>
+        <p:nvSpPr>
+          <p:cNvPr id="13" name="Oval 12"/>
           <p:cNvSpPr/>
           <p:nvPr/>
         </p:nvSpPr>
         <p:spPr>
           <a:xfrm>
-            <a:off x="8445288" y="1854200"/>
-            <a:ext cx="952476" cy="952500"/>
+            <a:off x="8445288" y="2984500"/>
+            <a:ext cx="482587" cy="482600"/>
           </a:xfrm>
           <a:prstGeom prst="ellipse">
             <a:avLst/>
@@ -5161,14 +4029,14 @@
       </p:sp>
       <p:sp>
         <p:nvSpPr>
-          <p:cNvPr id="13" name="TextBox 12"/>
+          <p:cNvPr id="14" name="TextBox 13"/>
           <p:cNvSpPr txBox="1"/>
           <p:nvPr/>
         </p:nvSpPr>
         <p:spPr>
           <a:xfrm>
-            <a:off x="8292892" y="2171700"/>
-            <a:ext cx="1333466" cy="241300"/>
+            <a:off x="7524561" y="3651250"/>
+            <a:ext cx="2349441" cy="266700"/>
           </a:xfrm>
           <a:prstGeom prst="rect">
             <a:avLst/>
@@ -5183,9 +4051,9 @@
           <a:p>
             <a:pPr algn="ctr"/>
             <a:r>
-              <a:rPr sz="2500" b="1">
-                <a:solidFill>
-                  <a:srgbClr val="FFFFFF"/>
+              <a:rPr sz="2900" b="1">
+                <a:solidFill>
+                  <a:srgbClr val="111827"/>
                 </a:solidFill>
                 <a:latin typeface="Aptos"/>
               </a:rPr>
@@ -5196,14 +4064,14 @@
       </p:sp>
       <p:sp>
         <p:nvSpPr>
-          <p:cNvPr id="14" name="TextBox 13"/>
+          <p:cNvPr id="15" name="TextBox 14"/>
           <p:cNvSpPr txBox="1"/>
           <p:nvPr/>
         </p:nvSpPr>
         <p:spPr>
           <a:xfrm>
-            <a:off x="7429314" y="3301999"/>
-            <a:ext cx="2603434" cy="622300"/>
+            <a:off x="7238819" y="4032249"/>
+            <a:ext cx="2984425" cy="635000"/>
           </a:xfrm>
           <a:prstGeom prst="rect">
             <a:avLst/>
@@ -5218,39 +4086,27 @@
           <a:p>
             <a:pPr algn="ctr"/>
             <a:r>
-              <a:rPr sz="2400" b="1">
-                <a:solidFill>
-                  <a:srgbClr val="111827"/>
+              <a:rPr sz="2200" b="0">
+                <a:solidFill>
+                  <a:srgbClr val="5F6B73"/>
                 </a:solidFill>
                 <a:latin typeface="Aptos"/>
               </a:rPr>
-              <a:t>write one point_cloud.ply</a:t>
-            </a:r>
-          </a:p>
-          <a:p>
-            <a:pPr algn="ctr"/>
-            <a:r>
-              <a:rPr sz="2400" b="1">
-                <a:solidFill>
-                  <a:srgbClr val="111827"/>
-                </a:solidFill>
-                <a:latin typeface="Aptos"/>
-              </a:rPr>
-              <a:t>render with Bicycle cameras</a:t>
-            </a:r>
-          </a:p>
-        </p:txBody>
-      </p:sp>
-      <p:sp>
-        <p:nvSpPr>
-          <p:cNvPr id="15" name="TextBox 14"/>
+              <a:t>Write one composed point_cloud.ply and render with Bicycle cameras.</a:t>
+            </a:r>
+          </a:p>
+        </p:txBody>
+      </p:sp>
+      <p:sp>
+        <p:nvSpPr>
+          <p:cNvPr id="16" name="TextBox 15"/>
           <p:cNvSpPr txBox="1"/>
           <p:nvPr/>
         </p:nvSpPr>
         <p:spPr>
           <a:xfrm>
-            <a:off x="698482" y="4794250"/>
-            <a:ext cx="2603434" cy="254000"/>
+            <a:off x="1015974" y="5207000"/>
+            <a:ext cx="2984425" cy="254000"/>
           </a:xfrm>
           <a:prstGeom prst="rect">
             <a:avLst/>
@@ -5271,21 +4127,21 @@
                 </a:solidFill>
                 <a:latin typeface="Aptos"/>
               </a:rPr>
-              <a:t>3DGS-specific updates</a:t>
-            </a:r>
-          </a:p>
-        </p:txBody>
-      </p:sp>
-      <p:sp>
-        <p:nvSpPr>
-          <p:cNvPr id="16" name="TextBox 15"/>
+              <a:t>Gaussian updates</a:t>
+            </a:r>
+          </a:p>
+        </p:txBody>
+      </p:sp>
+      <p:sp>
+        <p:nvSpPr>
+          <p:cNvPr id="17" name="TextBox 16"/>
           <p:cNvSpPr txBox="1"/>
           <p:nvPr/>
         </p:nvSpPr>
         <p:spPr>
           <a:xfrm>
-            <a:off x="698482" y="5156200"/>
-            <a:ext cx="4825879" cy="920750"/>
+            <a:off x="1015974" y="5556250"/>
+            <a:ext cx="4127396" cy="698500"/>
           </a:xfrm>
           <a:prstGeom prst="rect">
             <a:avLst/>
@@ -5300,62 +4156,50 @@
           <a:p>
             <a:pPr algn="l"/>
             <a:r>
-              <a:rPr sz="2400" b="0">
+              <a:rPr sz="2100" b="0">
                 <a:solidFill>
                   <a:srgbClr val="111827"/>
                 </a:solidFill>
                 <a:latin typeface="Aptos"/>
               </a:rPr>
-              <a:t>scale_* += log(s)</a:t>
+              <a:t>center: similarity transform</a:t>
             </a:r>
           </a:p>
           <a:p>
             <a:pPr algn="l"/>
             <a:r>
-              <a:rPr sz="2400" b="0">
+              <a:rPr sz="2100" b="0">
                 <a:solidFill>
                   <a:srgbClr val="111827"/>
                 </a:solidFill>
                 <a:latin typeface="Aptos"/>
               </a:rPr>
-              <a:t>rot_* = q_place * q_asset</a:t>
+              <a:t>scale: add log(s)</a:t>
             </a:r>
           </a:p>
           <a:p>
             <a:pPr algn="l"/>
             <a:r>
-              <a:rPr sz="2400" b="0">
+              <a:rPr sz="2100" b="0">
                 <a:solidFill>
                   <a:srgbClr val="111827"/>
                 </a:solidFill>
                 <a:latin typeface="Aptos"/>
               </a:rPr>
-              <a:t>opacity edited in sigmoid alpha space</a:t>
-            </a:r>
-          </a:p>
-          <a:p>
-            <a:pPr algn="l"/>
-            <a:r>
-              <a:rPr sz="2400" b="0">
-                <a:solidFill>
-                  <a:srgbClr val="111827"/>
-                </a:solidFill>
-                <a:latin typeface="Aptos"/>
-              </a:rPr>
-              <a:t>f_dc_* and f_rest_* support simple color matching</a:t>
-            </a:r>
-          </a:p>
-        </p:txBody>
-      </p:sp>
-      <p:sp>
-        <p:nvSpPr>
-          <p:cNvPr id="17" name="TextBox 16"/>
+              <a:t>rotation: q_place times q_asset</a:t>
+            </a:r>
+          </a:p>
+        </p:txBody>
+      </p:sp>
+      <p:sp>
+        <p:nvSpPr>
+          <p:cNvPr id="18" name="TextBox 17"/>
           <p:cNvSpPr txBox="1"/>
           <p:nvPr/>
         </p:nvSpPr>
         <p:spPr>
           <a:xfrm>
-            <a:off x="6413339" y="4794250"/>
+            <a:off x="6540336" y="5207000"/>
             <a:ext cx="2730431" cy="254000"/>
           </a:xfrm>
           <a:prstGeom prst="rect">
@@ -5377,21 +4221,21 @@
                 </a:solidFill>
                 <a:latin typeface="Aptos"/>
               </a:rPr>
-              <a:t>Why this reduces conflicts</a:t>
-            </a:r>
-          </a:p>
-        </p:txBody>
-      </p:sp>
-      <p:sp>
-        <p:nvSpPr>
-          <p:cNvPr id="18" name="TextBox 17"/>
+              <a:t>Why this helps</a:t>
+            </a:r>
+          </a:p>
+        </p:txBody>
+      </p:sp>
+      <p:sp>
+        <p:nvSpPr>
+          <p:cNvPr id="19" name="TextBox 18"/>
           <p:cNvSpPr txBox="1"/>
           <p:nvPr/>
         </p:nvSpPr>
         <p:spPr>
           <a:xfrm>
-            <a:off x="6413339" y="5156200"/>
-            <a:ext cx="4571885" cy="584200"/>
+            <a:off x="6540336" y="5556250"/>
+            <a:ext cx="4381390" cy="603250"/>
           </a:xfrm>
           <a:prstGeom prst="rect">
             <a:avLst/>
@@ -5406,13 +4250,13 @@
           <a:p>
             <a:pPr algn="l"/>
             <a:r>
-              <a:rPr sz="2400" b="0">
+              <a:rPr sz="2100" b="0">
                 <a:solidFill>
                   <a:srgbClr val="111827"/>
                 </a:solidFill>
                 <a:latin typeface="Aptos"/>
               </a:rPr>
-              <a:t>No 2D paste step: scene and object Gaussians are depth-sorted and alpha-composited by the same rasterizer.</a:t>
+              <a:t>Scene and asset splats are depth-sorted together, avoiding a separate 2D paste step.</a:t>
             </a:r>
           </a:p>
         </p:txBody>
@@ -5564,8 +4408,8 @@
         </p:blipFill>
         <p:spPr>
           <a:xfrm>
-            <a:off x="698482" y="1592123"/>
-            <a:ext cx="5714857" cy="3800752"/>
+            <a:off x="715399" y="1650999"/>
+            <a:ext cx="5681022" cy="3778250"/>
           </a:xfrm>
           <a:prstGeom prst="rect">
             <a:avLst/>
@@ -5580,8 +4424,8 @@
         </p:nvSpPr>
         <p:spPr>
           <a:xfrm>
-            <a:off x="698482" y="1587500"/>
-            <a:ext cx="5714857" cy="3810000"/>
+            <a:off x="698482" y="1650999"/>
+            <a:ext cx="5714857" cy="3778250"/>
           </a:xfrm>
           <a:prstGeom prst="rect">
             <a:avLst/>
@@ -5625,7 +4469,7 @@
         </p:nvSpPr>
         <p:spPr>
           <a:xfrm>
-            <a:off x="698482" y="5537200"/>
+            <a:off x="698482" y="5575300"/>
             <a:ext cx="2349441" cy="241300"/>
           </a:xfrm>
           <a:prstGeom prst="rect">
@@ -5660,7 +4504,7 @@
         </p:nvSpPr>
         <p:spPr>
           <a:xfrm>
-            <a:off x="6807029" y="1676400"/>
+            <a:off x="6807029" y="1752599"/>
             <a:ext cx="292092" cy="292100"/>
           </a:xfrm>
           <a:prstGeom prst="ellipse">
@@ -5703,8 +4547,8 @@
         </p:nvSpPr>
         <p:spPr>
           <a:xfrm>
-            <a:off x="7264218" y="1612900"/>
-            <a:ext cx="2920926" cy="266700"/>
+            <a:off x="7264218" y="1689100"/>
+            <a:ext cx="3174920" cy="266700"/>
           </a:xfrm>
           <a:prstGeom prst="rect">
             <a:avLst/>
@@ -5719,7 +4563,7 @@
           <a:p>
             <a:pPr algn="l"/>
             <a:r>
-              <a:rPr sz="2900" b="1">
+              <a:rPr sz="2800" b="1">
                 <a:solidFill>
                   <a:srgbClr val="111827"/>
                 </a:solidFill>
@@ -5738,8 +4582,8 @@
         </p:nvSpPr>
         <p:spPr>
           <a:xfrm>
-            <a:off x="7264218" y="1943100"/>
-            <a:ext cx="3936901" cy="584200"/>
+            <a:off x="7264218" y="2032000"/>
+            <a:ext cx="3936901" cy="660400"/>
           </a:xfrm>
           <a:prstGeom prst="rect">
             <a:avLst/>
@@ -5754,7 +4598,7 @@
           <a:p>
             <a:pPr algn="l"/>
             <a:r>
-              <a:rPr sz="2300" b="0">
+              <a:rPr sz="2100" b="0">
                 <a:solidFill>
                   <a:srgbClr val="5F6B73"/>
                 </a:solidFill>
@@ -5766,7 +4610,7 @@
           <a:p>
             <a:pPr algn="l"/>
             <a:r>
-              <a:rPr sz="2300" b="0">
+              <a:rPr sz="2100" b="0">
                 <a:solidFill>
                   <a:srgbClr val="5F6B73"/>
                 </a:solidFill>
@@ -5785,7 +4629,7 @@
         </p:nvSpPr>
         <p:spPr>
           <a:xfrm>
-            <a:off x="6807029" y="2705099"/>
+            <a:off x="6807029" y="2863850"/>
             <a:ext cx="292092" cy="292100"/>
           </a:xfrm>
           <a:prstGeom prst="ellipse">
@@ -5828,8 +4672,8 @@
         </p:nvSpPr>
         <p:spPr>
           <a:xfrm>
-            <a:off x="7264218" y="2641600"/>
-            <a:ext cx="2920926" cy="266700"/>
+            <a:off x="7264218" y="2800350"/>
+            <a:ext cx="3174920" cy="266700"/>
           </a:xfrm>
           <a:prstGeom prst="rect">
             <a:avLst/>
@@ -5844,7 +4688,7 @@
           <a:p>
             <a:pPr algn="l"/>
             <a:r>
-              <a:rPr sz="2900" b="1">
+              <a:rPr sz="2800" b="1">
                 <a:solidFill>
                   <a:srgbClr val="111827"/>
                 </a:solidFill>
@@ -5863,8 +4707,8 @@
         </p:nvSpPr>
         <p:spPr>
           <a:xfrm>
-            <a:off x="7264218" y="2971800"/>
-            <a:ext cx="3936901" cy="584200"/>
+            <a:off x="7264218" y="3143250"/>
+            <a:ext cx="3936901" cy="660400"/>
           </a:xfrm>
           <a:prstGeom prst="rect">
             <a:avLst/>
@@ -5879,7 +4723,7 @@
           <a:p>
             <a:pPr algn="l"/>
             <a:r>
-              <a:rPr sz="2300" b="0">
+              <a:rPr sz="2100" b="0">
                 <a:solidFill>
                   <a:srgbClr val="5F6B73"/>
                 </a:solidFill>
@@ -5891,7 +4735,7 @@
           <a:p>
             <a:pPr algn="l"/>
             <a:r>
-              <a:rPr sz="2300" b="0">
+              <a:rPr sz="2100" b="0">
                 <a:solidFill>
                   <a:srgbClr val="5F6B73"/>
                 </a:solidFill>
@@ -5910,7 +4754,7 @@
         </p:nvSpPr>
         <p:spPr>
           <a:xfrm>
-            <a:off x="6807029" y="3733799"/>
+            <a:off x="6807029" y="3975100"/>
             <a:ext cx="292092" cy="292100"/>
           </a:xfrm>
           <a:prstGeom prst="ellipse">
@@ -5953,8 +4797,8 @@
         </p:nvSpPr>
         <p:spPr>
           <a:xfrm>
-            <a:off x="7264218" y="3670300"/>
-            <a:ext cx="2920926" cy="266700"/>
+            <a:off x="7264218" y="3911600"/>
+            <a:ext cx="3174920" cy="266700"/>
           </a:xfrm>
           <a:prstGeom prst="rect">
             <a:avLst/>
@@ -5969,7 +4813,7 @@
           <a:p>
             <a:pPr algn="l"/>
             <a:r>
-              <a:rPr sz="2900" b="1">
+              <a:rPr sz="2800" b="1">
                 <a:solidFill>
                   <a:srgbClr val="111827"/>
                 </a:solidFill>
@@ -5988,8 +4832,8 @@
         </p:nvSpPr>
         <p:spPr>
           <a:xfrm>
-            <a:off x="7264218" y="4000500"/>
-            <a:ext cx="3936901" cy="584200"/>
+            <a:off x="7264218" y="4254500"/>
+            <a:ext cx="3936901" cy="660400"/>
           </a:xfrm>
           <a:prstGeom prst="rect">
             <a:avLst/>
@@ -6004,7 +4848,7 @@
           <a:p>
             <a:pPr algn="l"/>
             <a:r>
-              <a:rPr sz="2300" b="0">
+              <a:rPr sz="2100" b="0">
                 <a:solidFill>
                   <a:srgbClr val="5F6B73"/>
                 </a:solidFill>
@@ -6016,7 +4860,7 @@
           <a:p>
             <a:pPr algn="l"/>
             <a:r>
-              <a:rPr sz="2300" b="0">
+              <a:rPr sz="2100" b="0">
                 <a:solidFill>
                   <a:srgbClr val="5F6B73"/>
                 </a:solidFill>
@@ -6035,7 +4879,7 @@
         </p:nvSpPr>
         <p:spPr>
           <a:xfrm>
-            <a:off x="6807029" y="4762500"/>
+            <a:off x="6807029" y="5086350"/>
             <a:ext cx="292092" cy="292100"/>
           </a:xfrm>
           <a:prstGeom prst="ellipse">
@@ -6078,8 +4922,8 @@
         </p:nvSpPr>
         <p:spPr>
           <a:xfrm>
-            <a:off x="7264218" y="4699000"/>
-            <a:ext cx="2920926" cy="266700"/>
+            <a:off x="7264218" y="5022850"/>
+            <a:ext cx="3174920" cy="266700"/>
           </a:xfrm>
           <a:prstGeom prst="rect">
             <a:avLst/>
@@ -6094,7 +4938,7 @@
           <a:p>
             <a:pPr algn="l"/>
             <a:r>
-              <a:rPr sz="2900" b="1">
+              <a:rPr sz="2800" b="1">
                 <a:solidFill>
                   <a:srgbClr val="111827"/>
                 </a:solidFill>
@@ -6113,8 +4957,8 @@
         </p:nvSpPr>
         <p:spPr>
           <a:xfrm>
-            <a:off x="7264218" y="5029200"/>
-            <a:ext cx="3936901" cy="584200"/>
+            <a:off x="7264218" y="5365750"/>
+            <a:ext cx="3936901" cy="660400"/>
           </a:xfrm>
           <a:prstGeom prst="rect">
             <a:avLst/>
@@ -6129,7 +4973,7 @@
           <a:p>
             <a:pPr algn="l"/>
             <a:r>
-              <a:rPr sz="2300" b="0">
+              <a:rPr sz="2100" b="0">
                 <a:solidFill>
                   <a:srgbClr val="5F6B73"/>
                 </a:solidFill>
@@ -6141,7 +4985,7 @@
           <a:p>
             <a:pPr algn="l"/>
             <a:r>
-              <a:rPr sz="2300" b="0">
+              <a:rPr sz="2100" b="0">
                 <a:solidFill>
                   <a:srgbClr val="5F6B73"/>
                 </a:solidFill>
